--- a/00 Presentacion.pptx
+++ b/00 Presentacion.pptx
@@ -165,7 +165,7 @@
   <pc:docChgLst>
     <pc:chgData name="David Carballo" userId="a6ea3b2e-0d8d-477b-9aef-5860830a7859" providerId="ADAL" clId="{96B6F829-D70D-4ED8-B30B-F451AFAEC486}"/>
     <pc:docChg chg="undo custSel addSld delSld modSld sldOrd">
-      <pc:chgData name="David Carballo" userId="a6ea3b2e-0d8d-477b-9aef-5860830a7859" providerId="ADAL" clId="{96B6F829-D70D-4ED8-B30B-F451AFAEC486}" dt="2026-10-07T20:15:37.297" v="497" actId="20577"/>
+      <pc:chgData name="David Carballo" userId="a6ea3b2e-0d8d-477b-9aef-5860830a7859" providerId="ADAL" clId="{96B6F829-D70D-4ED8-B30B-F451AFAEC486}" dt="2026-10-07T20:23:10.178" v="503" actId="20577"/>
       <pc:docMkLst>
         <pc:docMk/>
       </pc:docMkLst>
@@ -201,7 +201,7 @@
         </pc:picChg>
       </pc:sldChg>
       <pc:sldChg chg="addSp delSp modSp mod">
-        <pc:chgData name="David Carballo" userId="a6ea3b2e-0d8d-477b-9aef-5860830a7859" providerId="ADAL" clId="{96B6F829-D70D-4ED8-B30B-F451AFAEC486}" dt="2026-10-07T19:33:13.236" v="78" actId="1076"/>
+        <pc:chgData name="David Carballo" userId="a6ea3b2e-0d8d-477b-9aef-5860830a7859" providerId="ADAL" clId="{96B6F829-D70D-4ED8-B30B-F451AFAEC486}" dt="2026-10-07T20:23:10.178" v="503" actId="20577"/>
         <pc:sldMkLst>
           <pc:docMk/>
           <pc:sldMk cId="0" sldId="257"/>
@@ -263,7 +263,7 @@
           </ac:spMkLst>
         </pc:spChg>
         <pc:spChg chg="add mod">
-          <ac:chgData name="David Carballo" userId="a6ea3b2e-0d8d-477b-9aef-5860830a7859" providerId="ADAL" clId="{96B6F829-D70D-4ED8-B30B-F451AFAEC486}" dt="2026-10-07T19:33:03.943" v="77" actId="1076"/>
+          <ac:chgData name="David Carballo" userId="a6ea3b2e-0d8d-477b-9aef-5860830a7859" providerId="ADAL" clId="{96B6F829-D70D-4ED8-B30B-F451AFAEC486}" dt="2026-10-07T20:23:10.178" v="503" actId="20577"/>
           <ac:spMkLst>
             <pc:docMk/>
             <pc:sldMk cId="0" sldId="257"/>
@@ -1856,8 +1856,8 @@
         </p:nvSpPr>
         <p:spPr/>
       </p:sp>
-      <mc:AlternateContent xmlns:mc="http://schemas.openxmlformats.org/markup-compatibility/2006">
-        <mc:Choice xmlns:a14="http://schemas.microsoft.com/office/drawing/2010/main" Requires="a14">
+      <mc:AlternateContent xmlns:mc="http://schemas.openxmlformats.org/markup-compatibility/2006" xmlns:a14="http://schemas.microsoft.com/office/drawing/2010/main">
+        <mc:Choice Requires="a14">
           <p:sp>
             <p:nvSpPr>
               <p:cNvPr id="3" name="Marcador de notas 2"/>
@@ -2087,7 +2087,7 @@
             </p:txBody>
           </p:sp>
         </mc:Choice>
-        <mc:Fallback>
+        <mc:Fallback xmlns="">
           <p:sp>
             <p:nvSpPr>
               <p:cNvPr id="3" name="Marcador de notas 2"/>
@@ -5749,7 +5749,25 @@
                 <a:ea typeface="Arial MT"/>
                 <a:cs typeface="Arial MT"/>
               </a:rPr>
-              <a:t> Soncco Sinchi Kurt Walter</a:t>
+              <a:t> Soncco Sinchi Kurt Walter </a:t>
+            </a:r>
+            <a:r>
+              <a:rPr lang="es-ES" sz="1050" spc="-30" dirty="0" err="1">
+                <a:effectLst/>
+                <a:latin typeface="+mn-lt"/>
+                <a:ea typeface="Arial MT"/>
+                <a:cs typeface="Arial MT"/>
+              </a:rPr>
+              <a:t>Ph.D</a:t>
+            </a:r>
+            <a:r>
+              <a:rPr lang="es-ES" sz="1050" spc="-30" dirty="0">
+                <a:effectLst/>
+                <a:latin typeface="+mn-lt"/>
+                <a:ea typeface="Arial MT"/>
+                <a:cs typeface="Arial MT"/>
+              </a:rPr>
+              <a:t>.</a:t>
             </a:r>
             <a:endParaRPr lang="es-CR" sz="1050" dirty="0">
               <a:effectLst/>
@@ -10385,8 +10403,8 @@
           </a:p>
         </p:txBody>
       </p:sp>
-      <mc:AlternateContent xmlns:mc="http://schemas.openxmlformats.org/markup-compatibility/2006">
-        <mc:Choice xmlns:a14="http://schemas.microsoft.com/office/drawing/2010/main" Requires="a14">
+      <mc:AlternateContent xmlns:mc="http://schemas.openxmlformats.org/markup-compatibility/2006" xmlns:a14="http://schemas.microsoft.com/office/drawing/2010/main">
+        <mc:Choice Requires="a14">
           <p:sp>
             <p:nvSpPr>
               <p:cNvPr id="23" name="CuadroTexto 22">
@@ -10511,7 +10529,7 @@
             </p:txBody>
           </p:sp>
         </mc:Choice>
-        <mc:Fallback>
+        <mc:Fallback xmlns="">
           <p:sp>
             <p:nvSpPr>
               <p:cNvPr id="23" name="CuadroTexto 22">

--- a/00 Presentacion.pptx
+++ b/00 Presentacion.pptx
@@ -5,7 +5,7 @@
     <p:sldMasterId id="2147483688" r:id="rId1"/>
   </p:sldMasterIdLst>
   <p:notesMasterIdLst>
-    <p:notesMasterId r:id="rId19"/>
+    <p:notesMasterId r:id="rId20"/>
   </p:notesMasterIdLst>
   <p:sldIdLst>
     <p:sldId id="257" r:id="rId2"/>
@@ -15,27 +15,28 @@
     <p:sldId id="258" r:id="rId6"/>
     <p:sldId id="269" r:id="rId7"/>
     <p:sldId id="267" r:id="rId8"/>
-    <p:sldId id="271" r:id="rId9"/>
-    <p:sldId id="260" r:id="rId10"/>
-    <p:sldId id="275" r:id="rId11"/>
-    <p:sldId id="276" r:id="rId12"/>
-    <p:sldId id="277" r:id="rId13"/>
-    <p:sldId id="278" r:id="rId14"/>
-    <p:sldId id="279" r:id="rId15"/>
-    <p:sldId id="263" r:id="rId16"/>
-    <p:sldId id="262" r:id="rId17"/>
-    <p:sldId id="268" r:id="rId18"/>
+    <p:sldId id="280" r:id="rId9"/>
+    <p:sldId id="271" r:id="rId10"/>
+    <p:sldId id="260" r:id="rId11"/>
+    <p:sldId id="275" r:id="rId12"/>
+    <p:sldId id="276" r:id="rId13"/>
+    <p:sldId id="277" r:id="rId14"/>
+    <p:sldId id="278" r:id="rId15"/>
+    <p:sldId id="279" r:id="rId16"/>
+    <p:sldId id="263" r:id="rId17"/>
+    <p:sldId id="262" r:id="rId18"/>
+    <p:sldId id="268" r:id="rId19"/>
   </p:sldIdLst>
   <p:sldSz cx="12192000" cy="6858000"/>
   <p:notesSz cx="6858000" cy="9144000"/>
   <p:embeddedFontLst>
     <p:embeddedFont>
       <p:font typeface="Inter"/>
-      <p:bold r:id="rId20"/>
+      <p:bold r:id="rId21"/>
     </p:embeddedFont>
     <p:embeddedFont>
       <p:font typeface="Outfit"/>
-      <p:bold r:id="rId21"/>
+      <p:bold r:id="rId22"/>
     </p:embeddedFont>
   </p:embeddedFontLst>
   <p:defaultTextStyle>
@@ -155,7 +156,7 @@
 <file path=ppt/revisionInfo.xml><?xml version="1.0" encoding="utf-8"?>
 <p1510:revInfo xmlns:a="http://schemas.openxmlformats.org/drawingml/2006/main" xmlns:r="http://schemas.openxmlformats.org/officeDocument/2006/relationships" xmlns:p1510="http://schemas.microsoft.com/office/powerpoint/2015/10/main">
   <p1510:revLst>
-    <p1510:client id="{EEC13FB2-F053-4889-98A8-01ADAA233FFE}" v="73" dt="2026-10-07T20:14:54.990"/>
+    <p1510:client id="{EEC13FB2-F053-4889-98A8-01ADAA233FFE}" v="76" dt="2026-10-07T21:45:19.333"/>
   </p1510:revLst>
 </p1510:revInfo>
 </file>
@@ -165,7 +166,7 @@
   <pc:docChgLst>
     <pc:chgData name="David Carballo" userId="a6ea3b2e-0d8d-477b-9aef-5860830a7859" providerId="ADAL" clId="{96B6F829-D70D-4ED8-B30B-F451AFAEC486}"/>
     <pc:docChg chg="undo custSel addSld delSld modSld sldOrd">
-      <pc:chgData name="David Carballo" userId="a6ea3b2e-0d8d-477b-9aef-5860830a7859" providerId="ADAL" clId="{96B6F829-D70D-4ED8-B30B-F451AFAEC486}" dt="2026-10-07T20:23:10.178" v="503" actId="20577"/>
+      <pc:chgData name="David Carballo" userId="a6ea3b2e-0d8d-477b-9aef-5860830a7859" providerId="ADAL" clId="{96B6F829-D70D-4ED8-B30B-F451AFAEC486}" dt="2026-10-07T21:46:17.982" v="587" actId="113"/>
       <pc:docMkLst>
         <pc:docMk/>
       </pc:docMkLst>
@@ -816,11 +817,27 @@
         </pc:sldMkLst>
       </pc:sldChg>
       <pc:sldChg chg="addSp delSp modSp add mod ord setBg">
-        <pc:chgData name="David Carballo" userId="a6ea3b2e-0d8d-477b-9aef-5860830a7859" providerId="ADAL" clId="{96B6F829-D70D-4ED8-B30B-F451AFAEC486}" dt="2026-10-07T19:59:06.244" v="338"/>
+        <pc:chgData name="David Carballo" userId="a6ea3b2e-0d8d-477b-9aef-5860830a7859" providerId="ADAL" clId="{96B6F829-D70D-4ED8-B30B-F451AFAEC486}" dt="2026-10-07T21:43:13.844" v="548" actId="22"/>
         <pc:sldMkLst>
           <pc:docMk/>
           <pc:sldMk cId="2755414019" sldId="267"/>
         </pc:sldMkLst>
+        <pc:spChg chg="add mod">
+          <ac:chgData name="David Carballo" userId="a6ea3b2e-0d8d-477b-9aef-5860830a7859" providerId="ADAL" clId="{96B6F829-D70D-4ED8-B30B-F451AFAEC486}" dt="2026-10-07T21:42:58.106" v="546" actId="1076"/>
+          <ac:spMkLst>
+            <pc:docMk/>
+            <pc:sldMk cId="2755414019" sldId="267"/>
+            <ac:spMk id="3" creationId="{26A8AA44-EC2A-45C7-213B-FE2330888199}"/>
+          </ac:spMkLst>
+        </pc:spChg>
+        <pc:spChg chg="add del">
+          <ac:chgData name="David Carballo" userId="a6ea3b2e-0d8d-477b-9aef-5860830a7859" providerId="ADAL" clId="{96B6F829-D70D-4ED8-B30B-F451AFAEC486}" dt="2026-10-07T21:43:13.844" v="548" actId="22"/>
+          <ac:spMkLst>
+            <pc:docMk/>
+            <pc:sldMk cId="2755414019" sldId="267"/>
+            <ac:spMk id="5" creationId="{D63C1C61-87AD-C0DA-59C9-5EC075EC2BBF}"/>
+          </ac:spMkLst>
+        </pc:spChg>
         <pc:spChg chg="mod">
           <ac:chgData name="David Carballo" userId="a6ea3b2e-0d8d-477b-9aef-5860830a7859" providerId="ADAL" clId="{96B6F829-D70D-4ED8-B30B-F451AFAEC486}" dt="2026-10-07T19:40:20.913" v="142" actId="1076"/>
           <ac:spMkLst>
@@ -965,8 +982,8 @@
           <pc:sldMk cId="3003854738" sldId="268"/>
         </pc:sldMkLst>
       </pc:sldChg>
-      <pc:sldChg chg="modSp add mod ord setBg">
-        <pc:chgData name="David Carballo" userId="a6ea3b2e-0d8d-477b-9aef-5860830a7859" providerId="ADAL" clId="{96B6F829-D70D-4ED8-B30B-F451AFAEC486}" dt="2026-10-07T20:12:59.247" v="496" actId="1076"/>
+      <pc:sldChg chg="addSp modSp add mod ord setBg">
+        <pc:chgData name="David Carballo" userId="a6ea3b2e-0d8d-477b-9aef-5860830a7859" providerId="ADAL" clId="{96B6F829-D70D-4ED8-B30B-F451AFAEC486}" dt="2026-10-07T21:43:59.325" v="557" actId="1076"/>
         <pc:sldMkLst>
           <pc:docMk/>
           <pc:sldMk cId="1474911700" sldId="269"/>
@@ -1049,6 +1066,46 @@
             <pc:docMk/>
             <pc:sldMk cId="1474911700" sldId="269"/>
             <ac:spMk id="17" creationId="{587131A8-930C-BD8A-73F2-A01EF35B65E7}"/>
+          </ac:spMkLst>
+        </pc:spChg>
+        <pc:spChg chg="add mod">
+          <ac:chgData name="David Carballo" userId="a6ea3b2e-0d8d-477b-9aef-5860830a7859" providerId="ADAL" clId="{96B6F829-D70D-4ED8-B30B-F451AFAEC486}" dt="2026-10-07T21:43:45.139" v="553" actId="20577"/>
+          <ac:spMkLst>
+            <pc:docMk/>
+            <pc:sldMk cId="1474911700" sldId="269"/>
+            <ac:spMk id="20" creationId="{A3598189-750D-92D5-95D1-CCD0094F722B}"/>
+          </ac:spMkLst>
+        </pc:spChg>
+        <pc:spChg chg="add mod">
+          <ac:chgData name="David Carballo" userId="a6ea3b2e-0d8d-477b-9aef-5860830a7859" providerId="ADAL" clId="{96B6F829-D70D-4ED8-B30B-F451AFAEC486}" dt="2026-10-07T21:42:15.022" v="541" actId="20577"/>
+          <ac:spMkLst>
+            <pc:docMk/>
+            <pc:sldMk cId="1474911700" sldId="269"/>
+            <ac:spMk id="22" creationId="{978EAAC7-C4F8-736C-8714-20A502404332}"/>
+          </ac:spMkLst>
+        </pc:spChg>
+        <pc:spChg chg="add mod">
+          <ac:chgData name="David Carballo" userId="a6ea3b2e-0d8d-477b-9aef-5860830a7859" providerId="ADAL" clId="{96B6F829-D70D-4ED8-B30B-F451AFAEC486}" dt="2026-10-07T21:43:40.097" v="550" actId="1076"/>
+          <ac:spMkLst>
+            <pc:docMk/>
+            <pc:sldMk cId="1474911700" sldId="269"/>
+            <ac:spMk id="24" creationId="{AE58AFE4-D6DC-9922-D1CE-65C294F54BF2}"/>
+          </ac:spMkLst>
+        </pc:spChg>
+        <pc:spChg chg="add mod">
+          <ac:chgData name="David Carballo" userId="a6ea3b2e-0d8d-477b-9aef-5860830a7859" providerId="ADAL" clId="{96B6F829-D70D-4ED8-B30B-F451AFAEC486}" dt="2026-10-07T21:43:53.604" v="555" actId="1076"/>
+          <ac:spMkLst>
+            <pc:docMk/>
+            <pc:sldMk cId="1474911700" sldId="269"/>
+            <ac:spMk id="26" creationId="{718982EC-B9D4-E443-2623-88B6892DF627}"/>
+          </ac:spMkLst>
+        </pc:spChg>
+        <pc:spChg chg="add mod">
+          <ac:chgData name="David Carballo" userId="a6ea3b2e-0d8d-477b-9aef-5860830a7859" providerId="ADAL" clId="{96B6F829-D70D-4ED8-B30B-F451AFAEC486}" dt="2026-10-07T21:43:59.325" v="557" actId="1076"/>
+          <ac:spMkLst>
+            <pc:docMk/>
+            <pc:sldMk cId="1474911700" sldId="269"/>
+            <ac:spMk id="28" creationId="{B9AD39B3-9D7A-B0D7-2ADA-9959E72D29C9}"/>
           </ac:spMkLst>
         </pc:spChg>
       </pc:sldChg>
@@ -1457,6 +1514,85 @@
           <pc:docMk/>
           <pc:sldMk cId="1318926329" sldId="279"/>
         </pc:sldMkLst>
+      </pc:sldChg>
+      <pc:sldChg chg="addSp delSp modSp add mod">
+        <pc:chgData name="David Carballo" userId="a6ea3b2e-0d8d-477b-9aef-5860830a7859" providerId="ADAL" clId="{96B6F829-D70D-4ED8-B30B-F451AFAEC486}" dt="2026-10-07T21:46:17.982" v="587" actId="113"/>
+        <pc:sldMkLst>
+          <pc:docMk/>
+          <pc:sldMk cId="1524771699" sldId="280"/>
+        </pc:sldMkLst>
+        <pc:spChg chg="del mod">
+          <ac:chgData name="David Carballo" userId="a6ea3b2e-0d8d-477b-9aef-5860830a7859" providerId="ADAL" clId="{96B6F829-D70D-4ED8-B30B-F451AFAEC486}" dt="2026-10-07T21:44:32.996" v="563" actId="478"/>
+          <ac:spMkLst>
+            <pc:docMk/>
+            <pc:sldMk cId="1524771699" sldId="280"/>
+            <ac:spMk id="3" creationId="{046A25EE-A0A9-332B-4732-15A7EE7C627D}"/>
+          </ac:spMkLst>
+        </pc:spChg>
+        <pc:spChg chg="add mod">
+          <ac:chgData name="David Carballo" userId="a6ea3b2e-0d8d-477b-9aef-5860830a7859" providerId="ADAL" clId="{96B6F829-D70D-4ED8-B30B-F451AFAEC486}" dt="2026-10-07T21:46:17.982" v="587" actId="113"/>
+          <ac:spMkLst>
+            <pc:docMk/>
+            <pc:sldMk cId="1524771699" sldId="280"/>
+            <ac:spMk id="4" creationId="{9B2EAB16-00BE-15DA-6EA2-67C47B2711D6}"/>
+          </ac:spMkLst>
+        </pc:spChg>
+        <pc:spChg chg="mod">
+          <ac:chgData name="David Carballo" userId="a6ea3b2e-0d8d-477b-9aef-5860830a7859" providerId="ADAL" clId="{96B6F829-D70D-4ED8-B30B-F451AFAEC486}" dt="2026-10-07T21:44:19.541" v="560" actId="14100"/>
+          <ac:spMkLst>
+            <pc:docMk/>
+            <pc:sldMk cId="1524771699" sldId="280"/>
+            <ac:spMk id="8" creationId="{A0AD89E7-B077-CBC4-6582-AF170F691522}"/>
+          </ac:spMkLst>
+        </pc:spChg>
+        <pc:spChg chg="del">
+          <ac:chgData name="David Carballo" userId="a6ea3b2e-0d8d-477b-9aef-5860830a7859" providerId="ADAL" clId="{96B6F829-D70D-4ED8-B30B-F451AFAEC486}" dt="2026-10-07T21:44:30.853" v="561" actId="478"/>
+          <ac:spMkLst>
+            <pc:docMk/>
+            <pc:sldMk cId="1524771699" sldId="280"/>
+            <ac:spMk id="9" creationId="{FDD517C0-86D5-214B-06E2-8CB65C78ADFD}"/>
+          </ac:spMkLst>
+        </pc:spChg>
+        <pc:spChg chg="del">
+          <ac:chgData name="David Carballo" userId="a6ea3b2e-0d8d-477b-9aef-5860830a7859" providerId="ADAL" clId="{96B6F829-D70D-4ED8-B30B-F451AFAEC486}" dt="2026-10-07T21:44:30.853" v="561" actId="478"/>
+          <ac:spMkLst>
+            <pc:docMk/>
+            <pc:sldMk cId="1524771699" sldId="280"/>
+            <ac:spMk id="13" creationId="{5FD5AC84-0023-923E-B08A-34987FD0DE12}"/>
+          </ac:spMkLst>
+        </pc:spChg>
+        <pc:spChg chg="del">
+          <ac:chgData name="David Carballo" userId="a6ea3b2e-0d8d-477b-9aef-5860830a7859" providerId="ADAL" clId="{96B6F829-D70D-4ED8-B30B-F451AFAEC486}" dt="2026-10-07T21:44:30.853" v="561" actId="478"/>
+          <ac:spMkLst>
+            <pc:docMk/>
+            <pc:sldMk cId="1524771699" sldId="280"/>
+            <ac:spMk id="14" creationId="{7CE0E80B-C746-9B16-3F95-832F61B18C05}"/>
+          </ac:spMkLst>
+        </pc:spChg>
+        <pc:spChg chg="del">
+          <ac:chgData name="David Carballo" userId="a6ea3b2e-0d8d-477b-9aef-5860830a7859" providerId="ADAL" clId="{96B6F829-D70D-4ED8-B30B-F451AFAEC486}" dt="2026-10-07T21:44:30.853" v="561" actId="478"/>
+          <ac:spMkLst>
+            <pc:docMk/>
+            <pc:sldMk cId="1524771699" sldId="280"/>
+            <ac:spMk id="16" creationId="{9CFD6EE4-1E23-FBE0-F4BA-47411401F51B}"/>
+          </ac:spMkLst>
+        </pc:spChg>
+        <pc:spChg chg="del">
+          <ac:chgData name="David Carballo" userId="a6ea3b2e-0d8d-477b-9aef-5860830a7859" providerId="ADAL" clId="{96B6F829-D70D-4ED8-B30B-F451AFAEC486}" dt="2026-10-07T21:44:30.853" v="561" actId="478"/>
+          <ac:spMkLst>
+            <pc:docMk/>
+            <pc:sldMk cId="1524771699" sldId="280"/>
+            <ac:spMk id="19" creationId="{6513A6A2-2C58-924B-3BDB-B58CA19173E2}"/>
+          </ac:spMkLst>
+        </pc:spChg>
+        <pc:spChg chg="del">
+          <ac:chgData name="David Carballo" userId="a6ea3b2e-0d8d-477b-9aef-5860830a7859" providerId="ADAL" clId="{96B6F829-D70D-4ED8-B30B-F451AFAEC486}" dt="2026-10-07T21:44:30.853" v="561" actId="478"/>
+          <ac:spMkLst>
+            <pc:docMk/>
+            <pc:sldMk cId="1524771699" sldId="280"/>
+            <ac:spMk id="21" creationId="{20713FD9-D35E-8565-8A45-C7E2E290869E}"/>
+          </ac:spMkLst>
+        </pc:spChg>
       </pc:sldChg>
       <pc:sldChg chg="add del setBg">
         <pc:chgData name="David Carballo" userId="a6ea3b2e-0d8d-477b-9aef-5860830a7859" providerId="ADAL" clId="{96B6F829-D70D-4ED8-B30B-F451AFAEC486}" dt="2026-10-07T20:12:41.764" v="495" actId="47"/>
@@ -2306,6 +2442,509 @@
 </p:notes>
 </file>
 
+<file path=ppt/notesSlides/notesSlide2.xml><?xml version="1.0" encoding="utf-8"?>
+<p:notes xmlns:a="http://schemas.openxmlformats.org/drawingml/2006/main" xmlns:r="http://schemas.openxmlformats.org/officeDocument/2006/relationships" xmlns:p="http://schemas.openxmlformats.org/presentationml/2006/main">
+  <p:cSld>
+    <p:spTree>
+      <p:nvGrpSpPr>
+        <p:cNvPr id="1" name="">
+          <a:extLst>
+            <a:ext uri="{FF2B5EF4-FFF2-40B4-BE49-F238E27FC236}">
+              <a16:creationId xmlns:a16="http://schemas.microsoft.com/office/drawing/2014/main" id="{EF2A2258-DD71-C3EC-430A-4DDCBB646CDD}"/>
+            </a:ext>
+          </a:extLst>
+        </p:cNvPr>
+        <p:cNvGrpSpPr/>
+        <p:nvPr/>
+      </p:nvGrpSpPr>
+      <p:grpSpPr>
+        <a:xfrm>
+          <a:off x="0" y="0"/>
+          <a:ext cx="0" cy="0"/>
+          <a:chOff x="0" y="0"/>
+          <a:chExt cx="0" cy="0"/>
+        </a:xfrm>
+      </p:grpSpPr>
+      <p:sp>
+        <p:nvSpPr>
+          <p:cNvPr id="2" name="Marcador de imagen de diapositiva 1">
+            <a:extLst>
+              <a:ext uri="{FF2B5EF4-FFF2-40B4-BE49-F238E27FC236}">
+                <a16:creationId xmlns:a16="http://schemas.microsoft.com/office/drawing/2014/main" id="{6930BC1D-D92B-C059-4946-CF294C534161}"/>
+              </a:ext>
+            </a:extLst>
+          </p:cNvPr>
+          <p:cNvSpPr>
+            <a:spLocks noGrp="1" noRot="1" noChangeAspect="1"/>
+          </p:cNvSpPr>
+          <p:nvPr>
+            <p:ph type="sldImg"/>
+          </p:nvPr>
+        </p:nvSpPr>
+        <p:spPr/>
+      </p:sp>
+      <mc:AlternateContent xmlns:mc="http://schemas.openxmlformats.org/markup-compatibility/2006" xmlns:a14="http://schemas.microsoft.com/office/drawing/2010/main">
+        <mc:Choice Requires="a14">
+          <p:sp>
+            <p:nvSpPr>
+              <p:cNvPr id="3" name="Marcador de notas 2">
+                <a:extLst>
+                  <a:ext uri="{FF2B5EF4-FFF2-40B4-BE49-F238E27FC236}">
+                    <a16:creationId xmlns:a16="http://schemas.microsoft.com/office/drawing/2014/main" id="{756A23AD-C765-26DA-3F05-D7E82063A160}"/>
+                  </a:ext>
+                </a:extLst>
+              </p:cNvPr>
+              <p:cNvSpPr>
+                <a:spLocks noGrp="1"/>
+              </p:cNvSpPr>
+              <p:nvPr>
+                <p:ph type="body" idx="1"/>
+              </p:nvPr>
+            </p:nvSpPr>
+            <p:spPr/>
+            <p:txBody>
+              <a:bodyPr/>
+              <a:lstStyle/>
+              <a:p>
+                <a:pPr lvl="0"/>
+                <a:r>
+                  <a:rPr lang="es-CR" b="1" dirty="0">
+                    <a:effectLst/>
+                  </a:rPr>
+                  <a:t>Pandas y </a:t>
+                </a:r>
+                <a:r>
+                  <a:rPr lang="es-CR" b="1" dirty="0" err="1">
+                    <a:effectLst/>
+                  </a:rPr>
+                  <a:t>NumPy</a:t>
+                </a:r>
+                <a:r>
+                  <a:rPr lang="es-CR" b="1" dirty="0">
+                    <a:effectLst/>
+                  </a:rPr>
+                  <a:t>:</a:t>
+                </a:r>
+                <a:r>
+                  <a:rPr lang="es-CR" dirty="0">
+                    <a:effectLst/>
+                  </a:rPr>
+                  <a:t> Arrancan el proyecto. Generan y ordenan la base de datos desde cero.</a:t>
+                </a:r>
+              </a:p>
+              <a:p>
+                <a:pPr lvl="0"/>
+                <a:r>
+                  <a:rPr lang="es-CR" b="1" dirty="0">
+                    <a:effectLst/>
+                  </a:rPr>
+                  <a:t>Scikit-Learn:</a:t>
+                </a:r>
+                <a:r>
+                  <a:rPr lang="es-CR" dirty="0">
+                    <a:effectLst/>
+                  </a:rPr>
+                  <a:t> Entra después para "limpiar" matemáticamente los datos (Z-Score) y agruparlos a ciegas (K-Means / PCA).</a:t>
+                </a:r>
+              </a:p>
+              <a:p>
+                <a:pPr lvl="0"/>
+                <a:r>
+                  <a:rPr lang="es-CR" b="1" dirty="0" err="1">
+                    <a:effectLst/>
+                  </a:rPr>
+                  <a:t>XGBoost</a:t>
+                </a:r>
+                <a:r>
+                  <a:rPr lang="es-CR" b="1" dirty="0">
+                    <a:effectLst/>
+                  </a:rPr>
+                  <a:t>:</a:t>
+                </a:r>
+                <a:r>
+                  <a:rPr lang="es-CR" dirty="0">
+                    <a:effectLst/>
+                  </a:rPr>
+                  <a:t> Es el corazón del proyecto. Entra a la mitad para aprender a clasificar el riesgo sísmico (el modelo ordinal).</a:t>
+                </a:r>
+              </a:p>
+              <a:p>
+                <a:pPr lvl="0"/>
+                <a:r>
+                  <a:rPr lang="es-CR" b="1" dirty="0" err="1">
+                    <a:effectLst/>
+                  </a:rPr>
+                  <a:t>Optuna</a:t>
+                </a:r>
+                <a:r>
+                  <a:rPr lang="es-CR" b="1" dirty="0">
+                    <a:effectLst/>
+                  </a:rPr>
+                  <a:t>:</a:t>
+                </a:r>
+                <a:r>
+                  <a:rPr lang="es-CR" dirty="0">
+                    <a:effectLst/>
+                  </a:rPr>
+                  <a:t> Entra junto a </a:t>
+                </a:r>
+                <a:r>
+                  <a:rPr lang="es-CR" dirty="0" err="1">
+                    <a:effectLst/>
+                  </a:rPr>
+                  <a:t>XGBoost</a:t>
+                </a:r>
+                <a:r>
+                  <a:rPr lang="es-CR" dirty="0">
+                    <a:effectLst/>
+                  </a:rPr>
+                  <a:t> para afinar sus tuercas y maximizar su precisión.</a:t>
+                </a:r>
+              </a:p>
+              <a:p>
+                <a:pPr lvl="0"/>
+                <a:r>
+                  <a:rPr lang="es-CR" b="1" dirty="0">
+                    <a:effectLst/>
+                  </a:rPr>
+                  <a:t>SHAP:</a:t>
+                </a:r>
+                <a:r>
+                  <a:rPr lang="es-CR" dirty="0">
+                    <a:effectLst/>
+                  </a:rPr>
+                  <a:t> Entra casi al final para auditar a </a:t>
+                </a:r>
+                <a:r>
+                  <a:rPr lang="es-CR" dirty="0" err="1">
+                    <a:effectLst/>
+                  </a:rPr>
+                  <a:t>XGBoost</a:t>
+                </a:r>
+                <a:r>
+                  <a:rPr lang="es-CR" dirty="0">
+                    <a:effectLst/>
+                  </a:rPr>
+                  <a:t> y obligarlo a confesar por qué tomó cada decisión.</a:t>
+                </a:r>
+              </a:p>
+              <a:p>
+                <a:pPr lvl="0"/>
+                <a:r>
+                  <a:rPr lang="es-CR" b="1" dirty="0" err="1">
+                    <a:effectLst/>
+                  </a:rPr>
+                  <a:t>PySR</a:t>
+                </a:r>
+                <a:r>
+                  <a:rPr lang="es-CR" b="1" dirty="0">
+                    <a:effectLst/>
+                  </a:rPr>
+                  <a:t>:</a:t>
+                </a:r>
+                <a:r>
+                  <a:rPr lang="es-CR" dirty="0">
+                    <a:effectLst/>
+                  </a:rPr>
+                  <a:t> Es la etapa final suprema. Entra al último para redescubrir la ecuación física </a:t>
+                </a:r>
+                <a14:m>
+                  <m:oMath xmlns:m="http://schemas.openxmlformats.org/officeDocument/2006/math">
+                    <m:r>
+                      <a:rPr lang="es-CR" sz="1200" i="1" kern="1200">
+                        <a:solidFill>
+                          <a:schemeClr val="tx1"/>
+                        </a:solidFill>
+                        <a:latin typeface="+mn-lt"/>
+                        <a:ea typeface="+mn-ea"/>
+                        <a:cs typeface="+mn-cs"/>
+                      </a:rPr>
+                      <m:t>𝑉</m:t>
+                    </m:r>
+                    <m:r>
+                      <a:rPr lang="es-CR" sz="1200" i="0" kern="1200">
+                        <a:solidFill>
+                          <a:schemeClr val="tx1"/>
+                        </a:solidFill>
+                        <a:latin typeface="+mn-lt"/>
+                        <a:ea typeface="+mn-ea"/>
+                        <a:cs typeface="+mn-cs"/>
+                      </a:rPr>
+                      <m:t>=</m:t>
+                    </m:r>
+                    <m:r>
+                      <a:rPr lang="es-CR" sz="1200" i="1" kern="1200">
+                        <a:solidFill>
+                          <a:schemeClr val="tx1"/>
+                        </a:solidFill>
+                        <a:latin typeface="+mn-lt"/>
+                        <a:ea typeface="+mn-ea"/>
+                        <a:cs typeface="+mn-cs"/>
+                      </a:rPr>
+                      <m:t>𝑍𝑈𝐶𝑆𝑃</m:t>
+                    </m:r>
+                    <m:r>
+                      <a:rPr lang="es-CR" sz="1200" i="0" kern="1200">
+                        <a:solidFill>
+                          <a:schemeClr val="tx1"/>
+                        </a:solidFill>
+                        <a:latin typeface="+mn-lt"/>
+                        <a:ea typeface="+mn-ea"/>
+                        <a:cs typeface="+mn-cs"/>
+                      </a:rPr>
+                      <m:t>/</m:t>
+                    </m:r>
+                    <m:r>
+                      <a:rPr lang="es-CR" sz="1200" i="1" kern="1200">
+                        <a:solidFill>
+                          <a:schemeClr val="tx1"/>
+                        </a:solidFill>
+                        <a:latin typeface="+mn-lt"/>
+                        <a:ea typeface="+mn-ea"/>
+                        <a:cs typeface="+mn-cs"/>
+                      </a:rPr>
+                      <m:t>𝑅</m:t>
+                    </m:r>
+                  </m:oMath>
+                </a14:m>
+                <a:r>
+                  <a:rPr lang="es-CR" dirty="0">
+                    <a:effectLst/>
+                  </a:rPr>
+                  <a:t>.</a:t>
+                </a:r>
+              </a:p>
+              <a:p>
+                <a:endParaRPr lang="es-CR" dirty="0"/>
+              </a:p>
+            </p:txBody>
+          </p:sp>
+        </mc:Choice>
+        <mc:Fallback xmlns="">
+          <p:sp>
+            <p:nvSpPr>
+              <p:cNvPr id="3" name="Marcador de notas 2"/>
+              <p:cNvSpPr>
+                <a:spLocks noGrp="1"/>
+              </p:cNvSpPr>
+              <p:nvPr>
+                <p:ph type="body" idx="1"/>
+              </p:nvPr>
+            </p:nvSpPr>
+            <p:spPr/>
+            <p:txBody>
+              <a:bodyPr/>
+              <a:lstStyle/>
+              <a:p>
+                <a:pPr lvl="0"/>
+                <a:r>
+                  <a:rPr lang="es-CR" b="1" dirty="0">
+                    <a:effectLst/>
+                  </a:rPr>
+                  <a:t>Pandas y </a:t>
+                </a:r>
+                <a:r>
+                  <a:rPr lang="es-CR" b="1" dirty="0" err="1">
+                    <a:effectLst/>
+                  </a:rPr>
+                  <a:t>NumPy</a:t>
+                </a:r>
+                <a:r>
+                  <a:rPr lang="es-CR" b="1" dirty="0">
+                    <a:effectLst/>
+                  </a:rPr>
+                  <a:t>:</a:t>
+                </a:r>
+                <a:r>
+                  <a:rPr lang="es-CR" dirty="0">
+                    <a:effectLst/>
+                  </a:rPr>
+                  <a:t> Arrancan el proyecto. Generan y ordenan la base de datos desde cero.</a:t>
+                </a:r>
+              </a:p>
+              <a:p>
+                <a:pPr lvl="0"/>
+                <a:r>
+                  <a:rPr lang="es-CR" b="1" dirty="0">
+                    <a:effectLst/>
+                  </a:rPr>
+                  <a:t>Scikit-Learn:</a:t>
+                </a:r>
+                <a:r>
+                  <a:rPr lang="es-CR" dirty="0">
+                    <a:effectLst/>
+                  </a:rPr>
+                  <a:t> Entra después para "limpiar" matemáticamente los datos (Z-Score) y agruparlos a ciegas (K-Means / PCA).</a:t>
+                </a:r>
+              </a:p>
+              <a:p>
+                <a:pPr lvl="0"/>
+                <a:r>
+                  <a:rPr lang="es-CR" b="1" dirty="0" err="1">
+                    <a:effectLst/>
+                  </a:rPr>
+                  <a:t>XGBoost</a:t>
+                </a:r>
+                <a:r>
+                  <a:rPr lang="es-CR" b="1" dirty="0">
+                    <a:effectLst/>
+                  </a:rPr>
+                  <a:t>:</a:t>
+                </a:r>
+                <a:r>
+                  <a:rPr lang="es-CR" dirty="0">
+                    <a:effectLst/>
+                  </a:rPr>
+                  <a:t> Es el corazón del proyecto. Entra a la mitad para aprender a clasificar el riesgo sísmico (el modelo ordinal).</a:t>
+                </a:r>
+              </a:p>
+              <a:p>
+                <a:pPr lvl="0"/>
+                <a:r>
+                  <a:rPr lang="es-CR" b="1" dirty="0" err="1">
+                    <a:effectLst/>
+                  </a:rPr>
+                  <a:t>Optuna</a:t>
+                </a:r>
+                <a:r>
+                  <a:rPr lang="es-CR" b="1" dirty="0">
+                    <a:effectLst/>
+                  </a:rPr>
+                  <a:t>:</a:t>
+                </a:r>
+                <a:r>
+                  <a:rPr lang="es-CR" dirty="0">
+                    <a:effectLst/>
+                  </a:rPr>
+                  <a:t> Entra junto a </a:t>
+                </a:r>
+                <a:r>
+                  <a:rPr lang="es-CR" dirty="0" err="1">
+                    <a:effectLst/>
+                  </a:rPr>
+                  <a:t>XGBoost</a:t>
+                </a:r>
+                <a:r>
+                  <a:rPr lang="es-CR" dirty="0">
+                    <a:effectLst/>
+                  </a:rPr>
+                  <a:t> para afinar sus tuercas y maximizar su precisión.</a:t>
+                </a:r>
+              </a:p>
+              <a:p>
+                <a:pPr lvl="0"/>
+                <a:r>
+                  <a:rPr lang="es-CR" b="1" dirty="0">
+                    <a:effectLst/>
+                  </a:rPr>
+                  <a:t>SHAP:</a:t>
+                </a:r>
+                <a:r>
+                  <a:rPr lang="es-CR" dirty="0">
+                    <a:effectLst/>
+                  </a:rPr>
+                  <a:t> Entra casi al final para auditar a </a:t>
+                </a:r>
+                <a:r>
+                  <a:rPr lang="es-CR" dirty="0" err="1">
+                    <a:effectLst/>
+                  </a:rPr>
+                  <a:t>XGBoost</a:t>
+                </a:r>
+                <a:r>
+                  <a:rPr lang="es-CR" dirty="0">
+                    <a:effectLst/>
+                  </a:rPr>
+                  <a:t> y obligarlo a confesar por qué tomó cada decisión.</a:t>
+                </a:r>
+              </a:p>
+              <a:p>
+                <a:pPr lvl="0"/>
+                <a:r>
+                  <a:rPr lang="es-CR" b="1" dirty="0" err="1">
+                    <a:effectLst/>
+                  </a:rPr>
+                  <a:t>PySR</a:t>
+                </a:r>
+                <a:r>
+                  <a:rPr lang="es-CR" b="1" dirty="0">
+                    <a:effectLst/>
+                  </a:rPr>
+                  <a:t>:</a:t>
+                </a:r>
+                <a:r>
+                  <a:rPr lang="es-CR" dirty="0">
+                    <a:effectLst/>
+                  </a:rPr>
+                  <a:t> Es la etapa final suprema. Entra al último para redescubrir la ecuación física </a:t>
+                </a:r>
+                <a:r>
+                  <a:rPr lang="es-CR" sz="1200" i="0" kern="1200">
+                    <a:solidFill>
+                      <a:schemeClr val="tx1"/>
+                    </a:solidFill>
+                    <a:latin typeface="+mn-lt"/>
+                    <a:ea typeface="+mn-ea"/>
+                    <a:cs typeface="+mn-cs"/>
+                  </a:rPr>
+                  <a:t>𝑉=𝑍𝑈𝐶𝑆𝑃/𝑅</a:t>
+                </a:r>
+                <a:r>
+                  <a:rPr lang="es-CR" dirty="0">
+                    <a:effectLst/>
+                  </a:rPr>
+                  <a:t>.</a:t>
+                </a:r>
+              </a:p>
+              <a:p>
+                <a:endParaRPr lang="es-CR" dirty="0"/>
+              </a:p>
+            </p:txBody>
+          </p:sp>
+        </mc:Fallback>
+      </mc:AlternateContent>
+      <p:sp>
+        <p:nvSpPr>
+          <p:cNvPr id="4" name="Marcador de número de diapositiva 3">
+            <a:extLst>
+              <a:ext uri="{FF2B5EF4-FFF2-40B4-BE49-F238E27FC236}">
+                <a16:creationId xmlns:a16="http://schemas.microsoft.com/office/drawing/2014/main" id="{A980F7B8-5E37-28A7-97B3-711A2B4A4D60}"/>
+              </a:ext>
+            </a:extLst>
+          </p:cNvPr>
+          <p:cNvSpPr>
+            <a:spLocks noGrp="1"/>
+          </p:cNvSpPr>
+          <p:nvPr>
+            <p:ph type="sldNum" sz="quarter" idx="5"/>
+          </p:nvPr>
+        </p:nvSpPr>
+        <p:spPr/>
+        <p:txBody>
+          <a:bodyPr/>
+          <a:lstStyle/>
+          <a:p>
+            <a:fld id="{29F3FA07-AF4F-4A30-85BB-B52DC87070B7}" type="slidenum">
+              <a:rPr lang="es-CR" smtClean="0"/>
+              <a:t>8</a:t>
+            </a:fld>
+            <a:endParaRPr lang="es-CR"/>
+          </a:p>
+        </p:txBody>
+      </p:sp>
+    </p:spTree>
+    <p:extLst>
+      <p:ext uri="{BB962C8B-B14F-4D97-AF65-F5344CB8AC3E}">
+        <p14:creationId xmlns:p14="http://schemas.microsoft.com/office/powerpoint/2010/main" val="3270185577"/>
+      </p:ext>
+    </p:extLst>
+  </p:cSld>
+  <p:clrMapOvr>
+    <a:masterClrMapping/>
+  </p:clrMapOvr>
+</p:notes>
+</file>
+
 <file path=ppt/slideLayouts/slideLayout1.xml><?xml version="1.0" encoding="utf-8"?>
 <p:sldLayout xmlns:a="http://schemas.openxmlformats.org/drawingml/2006/main" xmlns:r="http://schemas.openxmlformats.org/officeDocument/2006/relationships" xmlns:p="http://schemas.openxmlformats.org/presentationml/2006/main" type="title" preserve="1">
   <p:cSld name="Diapositiva de título">
@@ -6262,6 +6901,252 @@
 <file path=ppt/slides/slide10.xml><?xml version="1.0" encoding="utf-8"?>
 <p:sld xmlns:a="http://schemas.openxmlformats.org/drawingml/2006/main" xmlns:r="http://schemas.openxmlformats.org/officeDocument/2006/relationships" xmlns:p="http://schemas.openxmlformats.org/presentationml/2006/main">
   <p:cSld>
+    <p:bg>
+      <p:bgPr>
+        <a:solidFill>
+          <a:srgbClr val="FFFFFF"/>
+        </a:solidFill>
+        <a:effectLst/>
+      </p:bgPr>
+    </p:bg>
+    <p:spTree>
+      <p:nvGrpSpPr>
+        <p:cNvPr id="1" name=""/>
+        <p:cNvGrpSpPr/>
+        <p:nvPr/>
+      </p:nvGrpSpPr>
+      <p:grpSpPr>
+        <a:xfrm>
+          <a:off x="0" y="0"/>
+          <a:ext cx="0" cy="0"/>
+          <a:chOff x="0" y="0"/>
+          <a:chExt cx="0" cy="0"/>
+        </a:xfrm>
+      </p:grpSpPr>
+      <p:sp>
+        <p:nvSpPr>
+          <p:cNvPr id="8" name="TextBox 7"/>
+          <p:cNvSpPr txBox="1"/>
+          <p:nvPr/>
+        </p:nvSpPr>
+        <p:spPr>
+          <a:xfrm>
+            <a:off x="2906631" y="4169203"/>
+            <a:ext cx="4913461" cy="276999"/>
+          </a:xfrm>
+          <a:prstGeom prst="rect">
+            <a:avLst/>
+          </a:prstGeom>
+          <a:noFill/>
+        </p:spPr>
+        <p:txBody>
+          <a:bodyPr wrap="none" lIns="0" tIns="0" rIns="0" bIns="0" anchor="t">
+            <a:spAutoFit/>
+          </a:bodyPr>
+          <a:lstStyle/>
+          <a:p>
+            <a:r>
+              <a:rPr lang="en-US" b="1" dirty="0"/>
+              <a:t>Generación del Dataset y </a:t>
+            </a:r>
+            <a:r>
+              <a:rPr lang="en-US" b="1" dirty="0" err="1"/>
+              <a:t>Filtros</a:t>
+            </a:r>
+            <a:r>
+              <a:rPr lang="en-US" b="1" dirty="0"/>
+              <a:t> de </a:t>
+            </a:r>
+            <a:r>
+              <a:rPr lang="en-US" b="1" dirty="0" err="1"/>
+              <a:t>Coherencia</a:t>
+            </a:r>
+            <a:endParaRPr lang="es-CR" b="1" dirty="0"/>
+          </a:p>
+        </p:txBody>
+      </p:sp>
+      <p:sp>
+        <p:nvSpPr>
+          <p:cNvPr id="9" name="TextBox 8"/>
+          <p:cNvSpPr txBox="1"/>
+          <p:nvPr/>
+        </p:nvSpPr>
+        <p:spPr>
+          <a:xfrm>
+            <a:off x="2906631" y="4578778"/>
+            <a:ext cx="5326651" cy="230832"/>
+          </a:xfrm>
+          <a:prstGeom prst="rect">
+            <a:avLst/>
+          </a:prstGeom>
+          <a:noFill/>
+        </p:spPr>
+        <p:txBody>
+          <a:bodyPr wrap="none" lIns="0" tIns="0" rIns="0" bIns="0" anchor="t">
+            <a:spAutoFit/>
+          </a:bodyPr>
+          <a:lstStyle/>
+          <a:p>
+            <a:pPr algn="l"/>
+            <a:r>
+              <a:rPr lang="es-ES" sz="1500" b="0" i="0" u="none" dirty="0">
+                <a:solidFill>
+                  <a:srgbClr val="475569"/>
+                </a:solidFill>
+                <a:latin typeface="Inter"/>
+              </a:rPr>
+              <a:t>Se programó un script generador de 2,500 edificaciones en Python. </a:t>
+            </a:r>
+            <a:r>
+              <a:rPr sz="1500" b="0" i="0" u="none" dirty="0">
+                <a:solidFill>
+                  <a:srgbClr val="475569"/>
+                </a:solidFill>
+                <a:latin typeface="Inter"/>
+              </a:rPr>
+              <a:t>.</a:t>
+            </a:r>
+          </a:p>
+        </p:txBody>
+      </p:sp>
+      <p:sp>
+        <p:nvSpPr>
+          <p:cNvPr id="10" name="TextBox 9"/>
+          <p:cNvSpPr txBox="1"/>
+          <p:nvPr/>
+        </p:nvSpPr>
+        <p:spPr>
+          <a:xfrm>
+            <a:off x="2906631" y="5520460"/>
+            <a:ext cx="4675191" cy="276999"/>
+          </a:xfrm>
+          <a:prstGeom prst="rect">
+            <a:avLst/>
+          </a:prstGeom>
+          <a:noFill/>
+        </p:spPr>
+        <p:txBody>
+          <a:bodyPr wrap="none" lIns="0" tIns="0" rIns="0" bIns="0" anchor="t">
+            <a:spAutoFit/>
+          </a:bodyPr>
+          <a:lstStyle/>
+          <a:p>
+            <a:r>
+              <a:rPr lang="en-US" b="1" dirty="0"/>
+              <a:t>Purga de Fuga de </a:t>
+            </a:r>
+            <a:r>
+              <a:rPr lang="en-US" b="1" dirty="0" err="1"/>
+              <a:t>Información</a:t>
+            </a:r>
+            <a:r>
+              <a:rPr lang="en-US" b="1" dirty="0"/>
+              <a:t> (Data Leakage)</a:t>
+            </a:r>
+            <a:endParaRPr lang="es-CR" b="1" dirty="0"/>
+          </a:p>
+        </p:txBody>
+      </p:sp>
+      <p:sp>
+        <p:nvSpPr>
+          <p:cNvPr id="11" name="TextBox 10"/>
+          <p:cNvSpPr txBox="1"/>
+          <p:nvPr/>
+        </p:nvSpPr>
+        <p:spPr>
+          <a:xfrm>
+            <a:off x="2906631" y="5930035"/>
+            <a:ext cx="6307048" cy="230832"/>
+          </a:xfrm>
+          <a:prstGeom prst="rect">
+            <a:avLst/>
+          </a:prstGeom>
+          <a:noFill/>
+        </p:spPr>
+        <p:txBody>
+          <a:bodyPr wrap="none" lIns="0" tIns="0" rIns="0" bIns="0" anchor="t">
+            <a:spAutoFit/>
+          </a:bodyPr>
+          <a:lstStyle/>
+          <a:p>
+            <a:pPr algn="l"/>
+            <a:r>
+              <a:rPr lang="es-ES" sz="1500" b="0" i="0" u="none" dirty="0">
+                <a:solidFill>
+                  <a:srgbClr val="475569"/>
+                </a:solidFill>
+                <a:latin typeface="Inter"/>
+              </a:rPr>
+              <a:t>Durante las primeras pruebas, </a:t>
+            </a:r>
+            <a:r>
+              <a:rPr lang="es-ES" sz="1500" b="0" i="0" u="none" dirty="0" err="1">
+                <a:solidFill>
+                  <a:srgbClr val="475569"/>
+                </a:solidFill>
+                <a:latin typeface="Inter"/>
+              </a:rPr>
+              <a:t>XGBoost</a:t>
+            </a:r>
+            <a:r>
+              <a:rPr lang="es-ES" sz="1500" b="0" i="0" u="none" dirty="0">
+                <a:solidFill>
+                  <a:srgbClr val="475569"/>
+                </a:solidFill>
+                <a:latin typeface="Inter"/>
+              </a:rPr>
+              <a:t> alcanzó un 100% de exactitud predictiva. </a:t>
+            </a:r>
+            <a:endParaRPr sz="1500" b="0" i="0" u="none" dirty="0">
+              <a:solidFill>
+                <a:srgbClr val="475569"/>
+              </a:solidFill>
+              <a:latin typeface="Inter"/>
+            </a:endParaRPr>
+          </a:p>
+        </p:txBody>
+      </p:sp>
+      <p:pic>
+        <p:nvPicPr>
+          <p:cNvPr id="14" name="Picture 1">
+            <a:extLst>
+              <a:ext uri="{FF2B5EF4-FFF2-40B4-BE49-F238E27FC236}">
+                <a16:creationId xmlns:a16="http://schemas.microsoft.com/office/drawing/2014/main" id="{AB06859D-ED3C-1355-A1AF-83BB96BEE5FD}"/>
+              </a:ext>
+            </a:extLst>
+          </p:cNvPr>
+          <p:cNvPicPr>
+            <a:picLocks noChangeAspect="1"/>
+          </p:cNvPicPr>
+          <p:nvPr/>
+        </p:nvPicPr>
+        <p:blipFill>
+          <a:blip r:embed="rId2"/>
+          <a:stretch>
+            <a:fillRect/>
+          </a:stretch>
+        </p:blipFill>
+        <p:spPr>
+          <a:xfrm>
+            <a:off x="3183871" y="416086"/>
+            <a:ext cx="4916569" cy="3451842"/>
+          </a:xfrm>
+          <a:prstGeom prst="rect">
+            <a:avLst/>
+          </a:prstGeom>
+        </p:spPr>
+      </p:pic>
+    </p:spTree>
+  </p:cSld>
+  <p:clrMapOvr>
+    <a:masterClrMapping/>
+  </p:clrMapOvr>
+</p:sld>
+</file>
+
+<file path=ppt/slides/slide11.xml><?xml version="1.0" encoding="utf-8"?>
+<p:sld xmlns:a="http://schemas.openxmlformats.org/drawingml/2006/main" xmlns:r="http://schemas.openxmlformats.org/officeDocument/2006/relationships" xmlns:p="http://schemas.openxmlformats.org/presentationml/2006/main">
+  <p:cSld>
     <p:spTree>
       <p:nvGrpSpPr>
         <p:cNvPr id="1" name="">
@@ -6465,7 +7350,7 @@
 </p:sld>
 </file>
 
-<file path=ppt/slides/slide11.xml><?xml version="1.0" encoding="utf-8"?>
+<file path=ppt/slides/slide12.xml><?xml version="1.0" encoding="utf-8"?>
 <p:sld xmlns:a="http://schemas.openxmlformats.org/drawingml/2006/main" xmlns:r="http://schemas.openxmlformats.org/officeDocument/2006/relationships" xmlns:p="http://schemas.openxmlformats.org/presentationml/2006/main">
   <p:cSld>
     <p:spTree>
@@ -6668,7 +7553,7 @@
 </p:sld>
 </file>
 
-<file path=ppt/slides/slide12.xml><?xml version="1.0" encoding="utf-8"?>
+<file path=ppt/slides/slide13.xml><?xml version="1.0" encoding="utf-8"?>
 <p:sld xmlns:a="http://schemas.openxmlformats.org/drawingml/2006/main" xmlns:r="http://schemas.openxmlformats.org/officeDocument/2006/relationships" xmlns:p="http://schemas.openxmlformats.org/presentationml/2006/main">
   <p:cSld>
     <p:spTree>
@@ -6848,7 +7733,7 @@
 </p:sld>
 </file>
 
-<file path=ppt/slides/slide13.xml><?xml version="1.0" encoding="utf-8"?>
+<file path=ppt/slides/slide14.xml><?xml version="1.0" encoding="utf-8"?>
 <p:sld xmlns:a="http://schemas.openxmlformats.org/drawingml/2006/main" xmlns:r="http://schemas.openxmlformats.org/officeDocument/2006/relationships" xmlns:p="http://schemas.openxmlformats.org/presentationml/2006/main">
   <p:cSld>
     <p:spTree>
@@ -7094,7 +7979,7 @@
 </p:sld>
 </file>
 
-<file path=ppt/slides/slide14.xml><?xml version="1.0" encoding="utf-8"?>
+<file path=ppt/slides/slide15.xml><?xml version="1.0" encoding="utf-8"?>
 <p:sld xmlns:a="http://schemas.openxmlformats.org/drawingml/2006/main" xmlns:r="http://schemas.openxmlformats.org/officeDocument/2006/relationships" xmlns:p="http://schemas.openxmlformats.org/presentationml/2006/main">
   <p:cSld>
     <p:spTree>
@@ -7340,7 +8225,7 @@
 </p:sld>
 </file>
 
-<file path=ppt/slides/slide15.xml><?xml version="1.0" encoding="utf-8"?>
+<file path=ppt/slides/slide16.xml><?xml version="1.0" encoding="utf-8"?>
 <p:sld xmlns:a="http://schemas.openxmlformats.org/drawingml/2006/main" xmlns:r="http://schemas.openxmlformats.org/officeDocument/2006/relationships" xmlns:p="http://schemas.openxmlformats.org/presentationml/2006/main">
   <p:cSld>
     <p:bg>
@@ -8002,7 +8887,7 @@
 </p:sld>
 </file>
 
-<file path=ppt/slides/slide16.xml><?xml version="1.0" encoding="utf-8"?>
+<file path=ppt/slides/slide17.xml><?xml version="1.0" encoding="utf-8"?>
 <p:sld xmlns:a="http://schemas.openxmlformats.org/drawingml/2006/main" xmlns:r="http://schemas.openxmlformats.org/officeDocument/2006/relationships" xmlns:p="http://schemas.openxmlformats.org/presentationml/2006/main">
   <p:cSld>
     <p:bg>
@@ -8739,7 +9624,7 @@
 </p:sld>
 </file>
 
-<file path=ppt/slides/slide17.xml><?xml version="1.0" encoding="utf-8"?>
+<file path=ppt/slides/slide18.xml><?xml version="1.0" encoding="utf-8"?>
 <p:sld xmlns:a="http://schemas.openxmlformats.org/drawingml/2006/main" xmlns:r="http://schemas.openxmlformats.org/officeDocument/2006/relationships" xmlns:p="http://schemas.openxmlformats.org/presentationml/2006/main">
   <p:cSld>
     <p:spTree>
@@ -11117,7 +12002,7 @@
           <a:p>
             <a:pPr algn="l"/>
             <a:r>
-              <a:rPr sz="1800" b="1" i="0" u="none">
+              <a:rPr sz="1800" b="1" i="0" u="none" dirty="0">
                 <a:solidFill>
                   <a:srgbClr val="0F172A"/>
                 </a:solidFill>
@@ -11412,6 +12297,349 @@
               </a:rPr>
               <a:t>Validación física mediante librerías SHAP.</a:t>
             </a:r>
+          </a:p>
+        </p:txBody>
+      </p:sp>
+      <p:sp>
+        <p:nvSpPr>
+          <p:cNvPr id="20" name="CuadroTexto 19">
+            <a:extLst>
+              <a:ext uri="{FF2B5EF4-FFF2-40B4-BE49-F238E27FC236}">
+                <a16:creationId xmlns:a16="http://schemas.microsoft.com/office/drawing/2014/main" id="{A3598189-750D-92D5-95D1-CCD0094F722B}"/>
+              </a:ext>
+            </a:extLst>
+          </p:cNvPr>
+          <p:cNvSpPr txBox="1"/>
+          <p:nvPr/>
+        </p:nvSpPr>
+        <p:spPr>
+          <a:xfrm>
+            <a:off x="6424615" y="2005922"/>
+            <a:ext cx="5092592" cy="1477328"/>
+          </a:xfrm>
+          <a:prstGeom prst="rect">
+            <a:avLst/>
+          </a:prstGeom>
+          <a:noFill/>
+        </p:spPr>
+        <p:txBody>
+          <a:bodyPr wrap="square">
+            <a:spAutoFit/>
+          </a:bodyPr>
+          <a:lstStyle/>
+          <a:p>
+            <a:pPr marL="342900" lvl="0" indent="-342900">
+              <a:buFont typeface="Arial" panose="020B0604020202020204" pitchFamily="34" charset="0"/>
+              <a:buChar char="•"/>
+            </a:pPr>
+            <a:r>
+              <a:rPr lang="es-CR" b="1" dirty="0">
+                <a:solidFill>
+                  <a:srgbClr val="0F172A"/>
+                </a:solidFill>
+                <a:latin typeface="Outfit"/>
+              </a:rPr>
+              <a:t>Visual Studio Code (VS Code) -GEMINI.</a:t>
+            </a:r>
+          </a:p>
+          <a:p>
+            <a:pPr marL="342900" lvl="0" indent="-342900">
+              <a:buFont typeface="Arial" panose="020B0604020202020204" pitchFamily="34" charset="0"/>
+              <a:buChar char="•"/>
+            </a:pPr>
+            <a:endParaRPr lang="es-CR" b="1" dirty="0">
+              <a:solidFill>
+                <a:srgbClr val="0F172A"/>
+              </a:solidFill>
+              <a:latin typeface="Outfit"/>
+            </a:endParaRPr>
+          </a:p>
+          <a:p>
+            <a:pPr marL="342900" lvl="0" indent="-342900">
+              <a:buFont typeface="Arial" panose="020B0604020202020204" pitchFamily="34" charset="0"/>
+              <a:buChar char="•"/>
+            </a:pPr>
+            <a:r>
+              <a:rPr lang="es-CR" b="1" dirty="0" err="1">
+                <a:solidFill>
+                  <a:srgbClr val="0F172A"/>
+                </a:solidFill>
+                <a:latin typeface="Outfit"/>
+              </a:rPr>
+              <a:t>Jupyter</a:t>
+            </a:r>
+            <a:r>
+              <a:rPr lang="es-CR" b="1" dirty="0">
+                <a:solidFill>
+                  <a:srgbClr val="0F172A"/>
+                </a:solidFill>
+                <a:latin typeface="Outfit"/>
+              </a:rPr>
+              <a:t> Notebook</a:t>
+            </a:r>
+          </a:p>
+          <a:p>
+            <a:pPr marL="342900" lvl="0" indent="-342900">
+              <a:buFont typeface="Arial" panose="020B0604020202020204" pitchFamily="34" charset="0"/>
+              <a:buChar char="•"/>
+            </a:pPr>
+            <a:endParaRPr lang="es-CR" b="1" dirty="0">
+              <a:solidFill>
+                <a:srgbClr val="0F172A"/>
+              </a:solidFill>
+              <a:latin typeface="Outfit"/>
+            </a:endParaRPr>
+          </a:p>
+          <a:p>
+            <a:pPr marL="342900" lvl="0" indent="-342900">
+              <a:buFont typeface="Arial" panose="020B0604020202020204" pitchFamily="34" charset="0"/>
+              <a:buChar char="•"/>
+            </a:pPr>
+            <a:r>
+              <a:rPr lang="es-CR" b="1" dirty="0">
+                <a:solidFill>
+                  <a:srgbClr val="0F172A"/>
+                </a:solidFill>
+                <a:latin typeface="Outfit"/>
+              </a:rPr>
+              <a:t>Entorno Virtual de Python (.</a:t>
+            </a:r>
+            <a:r>
+              <a:rPr lang="es-CR" b="1" dirty="0" err="1">
+                <a:solidFill>
+                  <a:srgbClr val="0F172A"/>
+                </a:solidFill>
+                <a:latin typeface="Outfit"/>
+              </a:rPr>
+              <a:t>venv</a:t>
+            </a:r>
+            <a:r>
+              <a:rPr lang="es-CR" b="1" dirty="0">
+                <a:solidFill>
+                  <a:srgbClr val="0F172A"/>
+                </a:solidFill>
+                <a:latin typeface="Outfit"/>
+              </a:rPr>
+              <a:t>).</a:t>
+            </a:r>
+            <a:endParaRPr lang="es-CR" dirty="0">
+              <a:effectLst/>
+            </a:endParaRPr>
+          </a:p>
+        </p:txBody>
+      </p:sp>
+      <p:sp>
+        <p:nvSpPr>
+          <p:cNvPr id="22" name="TextBox 10">
+            <a:extLst>
+              <a:ext uri="{FF2B5EF4-FFF2-40B4-BE49-F238E27FC236}">
+                <a16:creationId xmlns:a16="http://schemas.microsoft.com/office/drawing/2014/main" id="{978EAAC7-C4F8-736C-8714-20A502404332}"/>
+              </a:ext>
+            </a:extLst>
+          </p:cNvPr>
+          <p:cNvSpPr txBox="1"/>
+          <p:nvPr/>
+        </p:nvSpPr>
+        <p:spPr>
+          <a:xfrm>
+            <a:off x="7048500" y="1209675"/>
+            <a:ext cx="1533112" cy="461665"/>
+          </a:xfrm>
+          <a:prstGeom prst="rect">
+            <a:avLst/>
+          </a:prstGeom>
+          <a:noFill/>
+        </p:spPr>
+        <p:txBody>
+          <a:bodyPr wrap="none" lIns="0" tIns="0" rIns="0" bIns="0" anchor="t">
+            <a:spAutoFit/>
+          </a:bodyPr>
+          <a:lstStyle/>
+          <a:p>
+            <a:pPr algn="l"/>
+            <a:r>
+              <a:rPr lang="en-US" sz="3000" b="1" dirty="0" err="1">
+                <a:solidFill>
+                  <a:srgbClr val="0F172A"/>
+                </a:solidFill>
+                <a:latin typeface="Outfit"/>
+              </a:rPr>
+              <a:t>Entornos</a:t>
+            </a:r>
+            <a:r>
+              <a:rPr sz="3000" b="1" i="0" u="none" dirty="0">
+                <a:solidFill>
+                  <a:srgbClr val="0F172A"/>
+                </a:solidFill>
+                <a:latin typeface="Outfit"/>
+              </a:rPr>
+              <a:t>.</a:t>
+            </a:r>
+          </a:p>
+        </p:txBody>
+      </p:sp>
+      <p:sp>
+        <p:nvSpPr>
+          <p:cNvPr id="24" name="Rounded Rectangle 4">
+            <a:extLst>
+              <a:ext uri="{FF2B5EF4-FFF2-40B4-BE49-F238E27FC236}">
+                <a16:creationId xmlns:a16="http://schemas.microsoft.com/office/drawing/2014/main" id="{AE58AFE4-D6DC-9922-D1CE-65C294F54BF2}"/>
+              </a:ext>
+            </a:extLst>
+          </p:cNvPr>
+          <p:cNvSpPr/>
+          <p:nvPr/>
+        </p:nvSpPr>
+        <p:spPr>
+          <a:xfrm>
+            <a:off x="6462715" y="2066925"/>
+            <a:ext cx="228600" cy="228600"/>
+          </a:xfrm>
+          <a:prstGeom prst="roundRect">
+            <a:avLst>
+              <a:gd name="adj" fmla="val 50000"/>
+            </a:avLst>
+          </a:prstGeom>
+          <a:solidFill>
+            <a:srgbClr val="4F46E5"/>
+          </a:solidFill>
+          <a:ln w="38100">
+            <a:solidFill>
+              <a:srgbClr val="FFFFFF"/>
+            </a:solidFill>
+          </a:ln>
+          <a:effectLst/>
+        </p:spPr>
+        <p:style>
+          <a:lnRef idx="1">
+            <a:schemeClr val="accent1"/>
+          </a:lnRef>
+          <a:fillRef idx="3">
+            <a:schemeClr val="accent1"/>
+          </a:fillRef>
+          <a:effectRef idx="2">
+            <a:schemeClr val="accent1"/>
+          </a:effectRef>
+          <a:fontRef idx="minor">
+            <a:schemeClr val="lt1"/>
+          </a:fontRef>
+        </p:style>
+        <p:txBody>
+          <a:bodyPr rtlCol="0" anchor="ctr"/>
+          <a:lstStyle/>
+          <a:p>
+            <a:pPr algn="ctr"/>
+            <a:endParaRPr/>
+          </a:p>
+        </p:txBody>
+      </p:sp>
+      <p:sp>
+        <p:nvSpPr>
+          <p:cNvPr id="26" name="Rounded Rectangle 4">
+            <a:extLst>
+              <a:ext uri="{FF2B5EF4-FFF2-40B4-BE49-F238E27FC236}">
+                <a16:creationId xmlns:a16="http://schemas.microsoft.com/office/drawing/2014/main" id="{718982EC-B9D4-E443-2623-88B6892DF627}"/>
+              </a:ext>
+            </a:extLst>
+          </p:cNvPr>
+          <p:cNvSpPr/>
+          <p:nvPr/>
+        </p:nvSpPr>
+        <p:spPr>
+          <a:xfrm>
+            <a:off x="6462715" y="2630286"/>
+            <a:ext cx="228600" cy="228600"/>
+          </a:xfrm>
+          <a:prstGeom prst="roundRect">
+            <a:avLst>
+              <a:gd name="adj" fmla="val 50000"/>
+            </a:avLst>
+          </a:prstGeom>
+          <a:solidFill>
+            <a:srgbClr val="4F46E5"/>
+          </a:solidFill>
+          <a:ln w="38100">
+            <a:solidFill>
+              <a:srgbClr val="FFFFFF"/>
+            </a:solidFill>
+          </a:ln>
+          <a:effectLst/>
+        </p:spPr>
+        <p:style>
+          <a:lnRef idx="1">
+            <a:schemeClr val="accent1"/>
+          </a:lnRef>
+          <a:fillRef idx="3">
+            <a:schemeClr val="accent1"/>
+          </a:fillRef>
+          <a:effectRef idx="2">
+            <a:schemeClr val="accent1"/>
+          </a:effectRef>
+          <a:fontRef idx="minor">
+            <a:schemeClr val="lt1"/>
+          </a:fontRef>
+        </p:style>
+        <p:txBody>
+          <a:bodyPr rtlCol="0" anchor="ctr"/>
+          <a:lstStyle/>
+          <a:p>
+            <a:pPr algn="ctr"/>
+            <a:endParaRPr/>
+          </a:p>
+        </p:txBody>
+      </p:sp>
+      <p:sp>
+        <p:nvSpPr>
+          <p:cNvPr id="28" name="Rounded Rectangle 4">
+            <a:extLst>
+              <a:ext uri="{FF2B5EF4-FFF2-40B4-BE49-F238E27FC236}">
+                <a16:creationId xmlns:a16="http://schemas.microsoft.com/office/drawing/2014/main" id="{B9AD39B3-9D7A-B0D7-2ADA-9959E72D29C9}"/>
+              </a:ext>
+            </a:extLst>
+          </p:cNvPr>
+          <p:cNvSpPr/>
+          <p:nvPr/>
+        </p:nvSpPr>
+        <p:spPr>
+          <a:xfrm>
+            <a:off x="6462715" y="3192896"/>
+            <a:ext cx="228600" cy="228600"/>
+          </a:xfrm>
+          <a:prstGeom prst="roundRect">
+            <a:avLst>
+              <a:gd name="adj" fmla="val 50000"/>
+            </a:avLst>
+          </a:prstGeom>
+          <a:solidFill>
+            <a:srgbClr val="4F46E5"/>
+          </a:solidFill>
+          <a:ln w="38100">
+            <a:solidFill>
+              <a:srgbClr val="FFFFFF"/>
+            </a:solidFill>
+          </a:ln>
+          <a:effectLst/>
+        </p:spPr>
+        <p:style>
+          <a:lnRef idx="1">
+            <a:schemeClr val="accent1"/>
+          </a:lnRef>
+          <a:fillRef idx="3">
+            <a:schemeClr val="accent1"/>
+          </a:fillRef>
+          <a:effectRef idx="2">
+            <a:schemeClr val="accent1"/>
+          </a:effectRef>
+          <a:fontRef idx="minor">
+            <a:schemeClr val="lt1"/>
+          </a:fontRef>
+        </p:style>
+        <p:txBody>
+          <a:bodyPr rtlCol="0" anchor="ctr"/>
+          <a:lstStyle/>
+          <a:p>
+            <a:pPr algn="ctr"/>
+            <a:endParaRPr/>
           </a:p>
         </p:txBody>
       </p:sp>
@@ -12080,6 +13308,62 @@
           </a:p>
         </p:txBody>
       </p:sp>
+      <p:sp>
+        <p:nvSpPr>
+          <p:cNvPr id="3" name="CuadroTexto 2">
+            <a:extLst>
+              <a:ext uri="{FF2B5EF4-FFF2-40B4-BE49-F238E27FC236}">
+                <a16:creationId xmlns:a16="http://schemas.microsoft.com/office/drawing/2014/main" id="{26A8AA44-EC2A-45C7-213B-FE2330888199}"/>
+              </a:ext>
+            </a:extLst>
+          </p:cNvPr>
+          <p:cNvSpPr txBox="1"/>
+          <p:nvPr/>
+        </p:nvSpPr>
+        <p:spPr>
+          <a:xfrm>
+            <a:off x="2614506" y="5720764"/>
+            <a:ext cx="7721600" cy="369332"/>
+          </a:xfrm>
+          <a:prstGeom prst="rect">
+            <a:avLst/>
+          </a:prstGeom>
+          <a:noFill/>
+        </p:spPr>
+        <p:txBody>
+          <a:bodyPr wrap="square">
+            <a:spAutoFit/>
+          </a:bodyPr>
+          <a:lstStyle/>
+          <a:p>
+            <a:r>
+              <a:rPr lang="es-CR" b="1" dirty="0">
+                <a:effectLst/>
+              </a:rPr>
+              <a:t>*Seaborn y </a:t>
+            </a:r>
+            <a:r>
+              <a:rPr lang="es-CR" b="1" dirty="0" err="1">
+                <a:effectLst/>
+              </a:rPr>
+              <a:t>Matplotlib</a:t>
+            </a:r>
+            <a:r>
+              <a:rPr lang="es-CR" b="1" dirty="0">
+                <a:effectLst/>
+              </a:rPr>
+              <a:t>:</a:t>
+            </a:r>
+            <a:r>
+              <a:rPr lang="es-CR" dirty="0">
+                <a:effectLst/>
+              </a:rPr>
+              <a:t> Librerías de dibujo científico y visualización gráfica</a:t>
+            </a:r>
+            <a:endParaRPr lang="es-CR" dirty="0"/>
+          </a:p>
+        </p:txBody>
+      </p:sp>
     </p:spTree>
     <p:extLst>
       <p:ext uri="{BB962C8B-B14F-4D97-AF65-F5344CB8AC3E}">
@@ -12094,6 +13378,404 @@
 </file>
 
 <file path=ppt/slides/slide8.xml><?xml version="1.0" encoding="utf-8"?>
+<p:sld xmlns:a="http://schemas.openxmlformats.org/drawingml/2006/main" xmlns:r="http://schemas.openxmlformats.org/officeDocument/2006/relationships" xmlns:p="http://schemas.openxmlformats.org/presentationml/2006/main">
+  <p:cSld>
+    <p:spTree>
+      <p:nvGrpSpPr>
+        <p:cNvPr id="1" name="">
+          <a:extLst>
+            <a:ext uri="{FF2B5EF4-FFF2-40B4-BE49-F238E27FC236}">
+              <a16:creationId xmlns:a16="http://schemas.microsoft.com/office/drawing/2014/main" id="{215CFBD3-5B44-61A9-1916-0B35D858B6A0}"/>
+            </a:ext>
+          </a:extLst>
+        </p:cNvPr>
+        <p:cNvGrpSpPr/>
+        <p:nvPr/>
+      </p:nvGrpSpPr>
+      <p:grpSpPr>
+        <a:xfrm>
+          <a:off x="0" y="0"/>
+          <a:ext cx="0" cy="0"/>
+          <a:chOff x="0" y="0"/>
+          <a:chExt cx="0" cy="0"/>
+        </a:xfrm>
+      </p:grpSpPr>
+      <p:sp>
+        <p:nvSpPr>
+          <p:cNvPr id="7" name="TextBox 6">
+            <a:extLst>
+              <a:ext uri="{FF2B5EF4-FFF2-40B4-BE49-F238E27FC236}">
+                <a16:creationId xmlns:a16="http://schemas.microsoft.com/office/drawing/2014/main" id="{3A9EC680-5A69-69D5-8C5B-65D2532D0B33}"/>
+              </a:ext>
+            </a:extLst>
+          </p:cNvPr>
+          <p:cNvSpPr txBox="1"/>
+          <p:nvPr/>
+        </p:nvSpPr>
+        <p:spPr>
+          <a:xfrm>
+            <a:off x="516294" y="600296"/>
+            <a:ext cx="6096000" cy="190500"/>
+          </a:xfrm>
+          <a:prstGeom prst="rect">
+            <a:avLst/>
+          </a:prstGeom>
+          <a:noFill/>
+        </p:spPr>
+        <p:txBody>
+          <a:bodyPr wrap="none" lIns="0" tIns="0" rIns="0" bIns="0" anchor="t">
+            <a:spAutoFit/>
+          </a:bodyPr>
+          <a:lstStyle/>
+          <a:p>
+            <a:pPr algn="l"/>
+            <a:r>
+              <a:rPr sz="1200" b="1" i="0" u="none">
+                <a:solidFill>
+                  <a:srgbClr val="4F46E5"/>
+                </a:solidFill>
+                <a:latin typeface="Outfit"/>
+              </a:rPr>
+              <a:t>EL PARADIGMA ACTUAL</a:t>
+            </a:r>
+          </a:p>
+        </p:txBody>
+      </p:sp>
+      <p:sp>
+        <p:nvSpPr>
+          <p:cNvPr id="8" name="TextBox 7">
+            <a:extLst>
+              <a:ext uri="{FF2B5EF4-FFF2-40B4-BE49-F238E27FC236}">
+                <a16:creationId xmlns:a16="http://schemas.microsoft.com/office/drawing/2014/main" id="{A0AD89E7-B077-CBC4-6582-AF170F691522}"/>
+              </a:ext>
+            </a:extLst>
+          </p:cNvPr>
+          <p:cNvSpPr txBox="1"/>
+          <p:nvPr/>
+        </p:nvSpPr>
+        <p:spPr>
+          <a:xfrm>
+            <a:off x="516293" y="943196"/>
+            <a:ext cx="5633893" cy="1107996"/>
+          </a:xfrm>
+          <a:prstGeom prst="rect">
+            <a:avLst/>
+          </a:prstGeom>
+          <a:noFill/>
+        </p:spPr>
+        <p:txBody>
+          <a:bodyPr wrap="square" lIns="0" tIns="0" rIns="0" bIns="0" anchor="t">
+            <a:spAutoFit/>
+          </a:bodyPr>
+          <a:lstStyle/>
+          <a:p>
+            <a:r>
+              <a:rPr lang="es-CR" sz="3600" b="1" dirty="0"/>
+              <a:t>ALGORITMOS y MÉTODOS MATEMÁTICOS</a:t>
+            </a:r>
+          </a:p>
+        </p:txBody>
+      </p:sp>
+      <p:sp>
+        <p:nvSpPr>
+          <p:cNvPr id="4" name="CuadroTexto 3">
+            <a:extLst>
+              <a:ext uri="{FF2B5EF4-FFF2-40B4-BE49-F238E27FC236}">
+                <a16:creationId xmlns:a16="http://schemas.microsoft.com/office/drawing/2014/main" id="{9B2EAB16-00BE-15DA-6EA2-67C47B2711D6}"/>
+              </a:ext>
+            </a:extLst>
+          </p:cNvPr>
+          <p:cNvSpPr txBox="1"/>
+          <p:nvPr/>
+        </p:nvSpPr>
+        <p:spPr>
+          <a:xfrm>
+            <a:off x="1408853" y="2624971"/>
+            <a:ext cx="8900160" cy="3323987"/>
+          </a:xfrm>
+          <a:prstGeom prst="rect">
+            <a:avLst/>
+          </a:prstGeom>
+          <a:noFill/>
+        </p:spPr>
+        <p:txBody>
+          <a:bodyPr wrap="square">
+            <a:spAutoFit/>
+          </a:bodyPr>
+          <a:lstStyle/>
+          <a:p>
+            <a:pPr marL="342900" lvl="0" indent="-342900">
+              <a:buFont typeface="Arial" panose="020B0604020202020204" pitchFamily="34" charset="0"/>
+              <a:buChar char="•"/>
+            </a:pPr>
+            <a:r>
+              <a:rPr lang="es-CR" sz="1400" b="1" dirty="0">
+                <a:effectLst/>
+              </a:rPr>
+              <a:t>Generador Aleatorio Uniforme:</a:t>
+            </a:r>
+            <a:r>
+              <a:rPr lang="es-CR" sz="1400" dirty="0">
+                <a:effectLst/>
+              </a:rPr>
+              <a:t> </a:t>
+            </a:r>
+            <a:r>
+              <a:rPr lang="es-CR" sz="1400" dirty="0" err="1">
+                <a:effectLst/>
+              </a:rPr>
+              <a:t>NumPy</a:t>
+            </a:r>
+            <a:r>
+              <a:rPr lang="es-CR" sz="1400" dirty="0">
+                <a:effectLst/>
+              </a:rPr>
+              <a:t> para crear las alturas y características aleatorias de los 2,500 edificios.</a:t>
+            </a:r>
+            <a:r>
+              <a:rPr lang="es-CR" sz="1400" dirty="0"/>
+              <a:t> El método de </a:t>
+            </a:r>
+            <a:endParaRPr lang="es-CR" sz="1400" dirty="0">
+              <a:effectLst/>
+            </a:endParaRPr>
+          </a:p>
+          <a:p>
+            <a:pPr marL="342900" lvl="0" indent="-342900">
+              <a:buFont typeface="Arial" panose="020B0604020202020204" pitchFamily="34" charset="0"/>
+              <a:buChar char="•"/>
+            </a:pPr>
+            <a:r>
+              <a:rPr lang="es-CR" sz="1400" b="1" dirty="0">
+                <a:effectLst/>
+              </a:rPr>
+              <a:t>Z-Score (</a:t>
+            </a:r>
+            <a:r>
+              <a:rPr lang="es-CR" sz="1400" b="1" dirty="0" err="1">
+                <a:effectLst/>
+              </a:rPr>
+              <a:t>StandardScaler</a:t>
+            </a:r>
+            <a:r>
+              <a:rPr lang="es-CR" sz="1400" b="1" dirty="0">
+                <a:effectLst/>
+              </a:rPr>
+              <a:t>):</a:t>
+            </a:r>
+            <a:r>
+              <a:rPr lang="es-CR" sz="1400" dirty="0">
+                <a:effectLst/>
+              </a:rPr>
+              <a:t> El método estadístico (de Scikit-Learn) para estandarizar y poner todos los números en la misma escala antes de entrenar.</a:t>
+            </a:r>
+          </a:p>
+          <a:p>
+            <a:pPr marL="342900" lvl="0" indent="-342900">
+              <a:buFont typeface="Arial" panose="020B0604020202020204" pitchFamily="34" charset="0"/>
+              <a:buChar char="•"/>
+            </a:pPr>
+            <a:r>
+              <a:rPr lang="es-CR" sz="1400" b="1" dirty="0">
+                <a:effectLst/>
+              </a:rPr>
+              <a:t>PCA (Análisis de Componentes Principales):</a:t>
+            </a:r>
+            <a:r>
+              <a:rPr lang="es-CR" sz="1400" dirty="0">
+                <a:effectLst/>
+              </a:rPr>
+              <a:t> El algoritmo matemático (de Scikit-Learn) para comprimir toda la información en un plano 2D.</a:t>
+            </a:r>
+          </a:p>
+          <a:p>
+            <a:pPr marL="342900" lvl="0" indent="-342900">
+              <a:buFont typeface="Arial" panose="020B0604020202020204" pitchFamily="34" charset="0"/>
+              <a:buChar char="•"/>
+            </a:pPr>
+            <a:r>
+              <a:rPr lang="es-CR" sz="1400" b="1" dirty="0">
+                <a:effectLst/>
+              </a:rPr>
+              <a:t>K-Means:</a:t>
+            </a:r>
+            <a:r>
+              <a:rPr lang="es-CR" sz="1400" dirty="0">
+                <a:effectLst/>
+              </a:rPr>
+              <a:t> El algoritmo de aprendizaje no supervisado (de Scikit-Learn) que busca el centro de gravedad de los datos para agrupar los edificios.</a:t>
+            </a:r>
+          </a:p>
+          <a:p>
+            <a:pPr marL="342900" lvl="0" indent="-342900">
+              <a:buFont typeface="Arial" panose="020B0604020202020204" pitchFamily="34" charset="0"/>
+              <a:buChar char="•"/>
+            </a:pPr>
+            <a:r>
+              <a:rPr lang="es-CR" sz="1400" b="1" dirty="0" err="1">
+                <a:effectLst/>
+              </a:rPr>
+              <a:t>Gradient</a:t>
+            </a:r>
+            <a:r>
+              <a:rPr lang="es-CR" sz="1400" b="1" dirty="0">
+                <a:effectLst/>
+              </a:rPr>
+              <a:t> </a:t>
+            </a:r>
+            <a:r>
+              <a:rPr lang="es-CR" sz="1400" b="1" dirty="0" err="1">
+                <a:effectLst/>
+              </a:rPr>
+              <a:t>Boosting</a:t>
+            </a:r>
+            <a:r>
+              <a:rPr lang="es-CR" sz="1400" b="1" dirty="0">
+                <a:effectLst/>
+              </a:rPr>
+              <a:t> Extremista:</a:t>
+            </a:r>
+            <a:r>
+              <a:rPr lang="es-CR" sz="1400" dirty="0">
+                <a:effectLst/>
+              </a:rPr>
+              <a:t> El algoritmo predictivo de árboles de decisión operando dentro de </a:t>
+            </a:r>
+            <a:r>
+              <a:rPr lang="es-CR" sz="1400" b="1" dirty="0" err="1">
+                <a:effectLst/>
+              </a:rPr>
+              <a:t>XGBoost</a:t>
+            </a:r>
+            <a:r>
+              <a:rPr lang="es-CR" sz="1400" dirty="0">
+                <a:effectLst/>
+              </a:rPr>
+              <a:t>.</a:t>
+            </a:r>
+          </a:p>
+          <a:p>
+            <a:pPr marL="342900" lvl="0" indent="-342900">
+              <a:buFont typeface="Arial" panose="020B0604020202020204" pitchFamily="34" charset="0"/>
+              <a:buChar char="•"/>
+            </a:pPr>
+            <a:r>
+              <a:rPr lang="es-CR" sz="1400" b="1" dirty="0">
+                <a:effectLst/>
+              </a:rPr>
+              <a:t>Regresión Ordinal Probabilística (</a:t>
+            </a:r>
+            <a:r>
+              <a:rPr lang="es-CR" sz="1400" b="1" dirty="0" err="1">
+                <a:effectLst/>
+              </a:rPr>
+              <a:t>Softprob</a:t>
+            </a:r>
+            <a:r>
+              <a:rPr lang="es-CR" sz="1400" b="1" dirty="0">
+                <a:effectLst/>
+              </a:rPr>
+              <a:t>):</a:t>
+            </a:r>
+            <a:r>
+              <a:rPr lang="es-CR" sz="1400" dirty="0">
+                <a:effectLst/>
+              </a:rPr>
+              <a:t> El método matemático que le inyectamos a</a:t>
+            </a:r>
+            <a:r>
+              <a:rPr lang="es-CR" sz="1400" b="1" dirty="0">
+                <a:effectLst/>
+              </a:rPr>
+              <a:t> </a:t>
+            </a:r>
+            <a:r>
+              <a:rPr lang="es-CR" sz="1400" b="1" dirty="0" err="1">
+                <a:effectLst/>
+              </a:rPr>
+              <a:t>XGBoost</a:t>
+            </a:r>
+            <a:r>
+              <a:rPr lang="es-CR" sz="1400" b="1" dirty="0">
+                <a:effectLst/>
+              </a:rPr>
+              <a:t> </a:t>
+            </a:r>
+            <a:r>
+              <a:rPr lang="es-CR" sz="1400" dirty="0">
+                <a:effectLst/>
+              </a:rPr>
+              <a:t>para enseñarle a ser adverso al riesgo y que tenga "miedo" de cometer Falsos Negativos catastróficos.</a:t>
+            </a:r>
+          </a:p>
+          <a:p>
+            <a:pPr marL="342900" lvl="0" indent="-342900">
+              <a:buFont typeface="Arial" panose="020B0604020202020204" pitchFamily="34" charset="0"/>
+              <a:buChar char="•"/>
+            </a:pPr>
+            <a:r>
+              <a:rPr lang="es-CR" sz="1400" b="1" dirty="0">
+                <a:effectLst/>
+              </a:rPr>
+              <a:t>Valores de Shapley (Teoría de Juegos):</a:t>
+            </a:r>
+            <a:r>
+              <a:rPr lang="es-CR" sz="1400" dirty="0">
+                <a:effectLst/>
+              </a:rPr>
+              <a:t> El algoritmo matemático ejecutado por la librería</a:t>
+            </a:r>
+            <a:r>
+              <a:rPr lang="es-CR" sz="1400" b="1" dirty="0">
+                <a:effectLst/>
+              </a:rPr>
+              <a:t> SHAP </a:t>
+            </a:r>
+            <a:r>
+              <a:rPr lang="es-CR" sz="1400" dirty="0">
+                <a:effectLst/>
+              </a:rPr>
+              <a:t>para asignar a cada variable su nivel de "culpa" en el colapso del edificio.</a:t>
+            </a:r>
+          </a:p>
+          <a:p>
+            <a:pPr marL="342900" lvl="0" indent="-342900">
+              <a:buFont typeface="Arial" panose="020B0604020202020204" pitchFamily="34" charset="0"/>
+              <a:buChar char="•"/>
+            </a:pPr>
+            <a:r>
+              <a:rPr lang="es-CR" sz="1400" b="1" dirty="0"/>
+              <a:t>Algoritmo Genético Evolutivo:</a:t>
+            </a:r>
+            <a:r>
+              <a:rPr lang="es-CR" sz="1400" dirty="0"/>
+              <a:t> La técnica de mutación darwiniana que usa </a:t>
+            </a:r>
+            <a:r>
+              <a:rPr lang="es-CR" sz="1400" b="1" dirty="0" err="1"/>
+              <a:t>PySR</a:t>
+            </a:r>
+            <a:r>
+              <a:rPr lang="es-CR" sz="1400" dirty="0"/>
+              <a:t> para redescubrir la ecuación de la norma E.030 de la nada.</a:t>
+            </a:r>
+          </a:p>
+        </p:txBody>
+      </p:sp>
+    </p:spTree>
+    <p:extLst>
+      <p:ext uri="{BB962C8B-B14F-4D97-AF65-F5344CB8AC3E}">
+        <p14:creationId xmlns:p14="http://schemas.microsoft.com/office/powerpoint/2010/main" val="1524771699"/>
+      </p:ext>
+    </p:extLst>
+  </p:cSld>
+  <p:clrMapOvr>
+    <a:masterClrMapping/>
+  </p:clrMapOvr>
+</p:sld>
+</file>
+
+<file path=ppt/slides/slide9.xml><?xml version="1.0" encoding="utf-8"?>
 <p:sld xmlns:a="http://schemas.openxmlformats.org/drawingml/2006/main" xmlns:r="http://schemas.openxmlformats.org/officeDocument/2006/relationships" xmlns:p="http://schemas.openxmlformats.org/presentationml/2006/main">
   <p:cSld>
     <p:spTree>
@@ -12229,252 +13911,6 @@
         <p14:creationId xmlns:p14="http://schemas.microsoft.com/office/powerpoint/2010/main" val="841173608"/>
       </p:ext>
     </p:extLst>
-  </p:cSld>
-  <p:clrMapOvr>
-    <a:masterClrMapping/>
-  </p:clrMapOvr>
-</p:sld>
-</file>
-
-<file path=ppt/slides/slide9.xml><?xml version="1.0" encoding="utf-8"?>
-<p:sld xmlns:a="http://schemas.openxmlformats.org/drawingml/2006/main" xmlns:r="http://schemas.openxmlformats.org/officeDocument/2006/relationships" xmlns:p="http://schemas.openxmlformats.org/presentationml/2006/main">
-  <p:cSld>
-    <p:bg>
-      <p:bgPr>
-        <a:solidFill>
-          <a:srgbClr val="FFFFFF"/>
-        </a:solidFill>
-        <a:effectLst/>
-      </p:bgPr>
-    </p:bg>
-    <p:spTree>
-      <p:nvGrpSpPr>
-        <p:cNvPr id="1" name=""/>
-        <p:cNvGrpSpPr/>
-        <p:nvPr/>
-      </p:nvGrpSpPr>
-      <p:grpSpPr>
-        <a:xfrm>
-          <a:off x="0" y="0"/>
-          <a:ext cx="0" cy="0"/>
-          <a:chOff x="0" y="0"/>
-          <a:chExt cx="0" cy="0"/>
-        </a:xfrm>
-      </p:grpSpPr>
-      <p:sp>
-        <p:nvSpPr>
-          <p:cNvPr id="8" name="TextBox 7"/>
-          <p:cNvSpPr txBox="1"/>
-          <p:nvPr/>
-        </p:nvSpPr>
-        <p:spPr>
-          <a:xfrm>
-            <a:off x="2906631" y="4169203"/>
-            <a:ext cx="4913461" cy="276999"/>
-          </a:xfrm>
-          <a:prstGeom prst="rect">
-            <a:avLst/>
-          </a:prstGeom>
-          <a:noFill/>
-        </p:spPr>
-        <p:txBody>
-          <a:bodyPr wrap="none" lIns="0" tIns="0" rIns="0" bIns="0" anchor="t">
-            <a:spAutoFit/>
-          </a:bodyPr>
-          <a:lstStyle/>
-          <a:p>
-            <a:r>
-              <a:rPr lang="en-US" b="1" dirty="0"/>
-              <a:t>Generación del Dataset y </a:t>
-            </a:r>
-            <a:r>
-              <a:rPr lang="en-US" b="1" dirty="0" err="1"/>
-              <a:t>Filtros</a:t>
-            </a:r>
-            <a:r>
-              <a:rPr lang="en-US" b="1" dirty="0"/>
-              <a:t> de </a:t>
-            </a:r>
-            <a:r>
-              <a:rPr lang="en-US" b="1" dirty="0" err="1"/>
-              <a:t>Coherencia</a:t>
-            </a:r>
-            <a:endParaRPr lang="es-CR" b="1" dirty="0"/>
-          </a:p>
-        </p:txBody>
-      </p:sp>
-      <p:sp>
-        <p:nvSpPr>
-          <p:cNvPr id="9" name="TextBox 8"/>
-          <p:cNvSpPr txBox="1"/>
-          <p:nvPr/>
-        </p:nvSpPr>
-        <p:spPr>
-          <a:xfrm>
-            <a:off x="2906631" y="4578778"/>
-            <a:ext cx="5326651" cy="230832"/>
-          </a:xfrm>
-          <a:prstGeom prst="rect">
-            <a:avLst/>
-          </a:prstGeom>
-          <a:noFill/>
-        </p:spPr>
-        <p:txBody>
-          <a:bodyPr wrap="none" lIns="0" tIns="0" rIns="0" bIns="0" anchor="t">
-            <a:spAutoFit/>
-          </a:bodyPr>
-          <a:lstStyle/>
-          <a:p>
-            <a:pPr algn="l"/>
-            <a:r>
-              <a:rPr lang="es-ES" sz="1500" b="0" i="0" u="none" dirty="0">
-                <a:solidFill>
-                  <a:srgbClr val="475569"/>
-                </a:solidFill>
-                <a:latin typeface="Inter"/>
-              </a:rPr>
-              <a:t>Se programó un script generador de 2,500 edificaciones en Python. </a:t>
-            </a:r>
-            <a:r>
-              <a:rPr sz="1500" b="0" i="0" u="none" dirty="0">
-                <a:solidFill>
-                  <a:srgbClr val="475569"/>
-                </a:solidFill>
-                <a:latin typeface="Inter"/>
-              </a:rPr>
-              <a:t>.</a:t>
-            </a:r>
-          </a:p>
-        </p:txBody>
-      </p:sp>
-      <p:sp>
-        <p:nvSpPr>
-          <p:cNvPr id="10" name="TextBox 9"/>
-          <p:cNvSpPr txBox="1"/>
-          <p:nvPr/>
-        </p:nvSpPr>
-        <p:spPr>
-          <a:xfrm>
-            <a:off x="2906631" y="5520460"/>
-            <a:ext cx="4675191" cy="276999"/>
-          </a:xfrm>
-          <a:prstGeom prst="rect">
-            <a:avLst/>
-          </a:prstGeom>
-          <a:noFill/>
-        </p:spPr>
-        <p:txBody>
-          <a:bodyPr wrap="none" lIns="0" tIns="0" rIns="0" bIns="0" anchor="t">
-            <a:spAutoFit/>
-          </a:bodyPr>
-          <a:lstStyle/>
-          <a:p>
-            <a:r>
-              <a:rPr lang="en-US" b="1" dirty="0"/>
-              <a:t>Purga de Fuga de </a:t>
-            </a:r>
-            <a:r>
-              <a:rPr lang="en-US" b="1" dirty="0" err="1"/>
-              <a:t>Información</a:t>
-            </a:r>
-            <a:r>
-              <a:rPr lang="en-US" b="1" dirty="0"/>
-              <a:t> (Data Leakage)</a:t>
-            </a:r>
-            <a:endParaRPr lang="es-CR" b="1" dirty="0"/>
-          </a:p>
-        </p:txBody>
-      </p:sp>
-      <p:sp>
-        <p:nvSpPr>
-          <p:cNvPr id="11" name="TextBox 10"/>
-          <p:cNvSpPr txBox="1"/>
-          <p:nvPr/>
-        </p:nvSpPr>
-        <p:spPr>
-          <a:xfrm>
-            <a:off x="2906631" y="5930035"/>
-            <a:ext cx="6307048" cy="230832"/>
-          </a:xfrm>
-          <a:prstGeom prst="rect">
-            <a:avLst/>
-          </a:prstGeom>
-          <a:noFill/>
-        </p:spPr>
-        <p:txBody>
-          <a:bodyPr wrap="none" lIns="0" tIns="0" rIns="0" bIns="0" anchor="t">
-            <a:spAutoFit/>
-          </a:bodyPr>
-          <a:lstStyle/>
-          <a:p>
-            <a:pPr algn="l"/>
-            <a:r>
-              <a:rPr lang="es-ES" sz="1500" b="0" i="0" u="none" dirty="0">
-                <a:solidFill>
-                  <a:srgbClr val="475569"/>
-                </a:solidFill>
-                <a:latin typeface="Inter"/>
-              </a:rPr>
-              <a:t>Durante las primeras pruebas, </a:t>
-            </a:r>
-            <a:r>
-              <a:rPr lang="es-ES" sz="1500" b="0" i="0" u="none" dirty="0" err="1">
-                <a:solidFill>
-                  <a:srgbClr val="475569"/>
-                </a:solidFill>
-                <a:latin typeface="Inter"/>
-              </a:rPr>
-              <a:t>XGBoost</a:t>
-            </a:r>
-            <a:r>
-              <a:rPr lang="es-ES" sz="1500" b="0" i="0" u="none" dirty="0">
-                <a:solidFill>
-                  <a:srgbClr val="475569"/>
-                </a:solidFill>
-                <a:latin typeface="Inter"/>
-              </a:rPr>
-              <a:t> alcanzó un 100% de exactitud predictiva. </a:t>
-            </a:r>
-            <a:endParaRPr sz="1500" b="0" i="0" u="none" dirty="0">
-              <a:solidFill>
-                <a:srgbClr val="475569"/>
-              </a:solidFill>
-              <a:latin typeface="Inter"/>
-            </a:endParaRPr>
-          </a:p>
-        </p:txBody>
-      </p:sp>
-      <p:pic>
-        <p:nvPicPr>
-          <p:cNvPr id="14" name="Picture 1">
-            <a:extLst>
-              <a:ext uri="{FF2B5EF4-FFF2-40B4-BE49-F238E27FC236}">
-                <a16:creationId xmlns:a16="http://schemas.microsoft.com/office/drawing/2014/main" id="{AB06859D-ED3C-1355-A1AF-83BB96BEE5FD}"/>
-              </a:ext>
-            </a:extLst>
-          </p:cNvPr>
-          <p:cNvPicPr>
-            <a:picLocks noChangeAspect="1"/>
-          </p:cNvPicPr>
-          <p:nvPr/>
-        </p:nvPicPr>
-        <p:blipFill>
-          <a:blip r:embed="rId2"/>
-          <a:stretch>
-            <a:fillRect/>
-          </a:stretch>
-        </p:blipFill>
-        <p:spPr>
-          <a:xfrm>
-            <a:off x="3183871" y="416086"/>
-            <a:ext cx="4916569" cy="3451842"/>
-          </a:xfrm>
-          <a:prstGeom prst="rect">
-            <a:avLst/>
-          </a:prstGeom>
-        </p:spPr>
-      </p:pic>
-    </p:spTree>
   </p:cSld>
   <p:clrMapOvr>
     <a:masterClrMapping/>
